--- a/embedded/RobotOperatingSystem/My_ROS2_robot.pptx
+++ b/embedded/RobotOperatingSystem/My_ROS2_robot.pptx
@@ -10,6 +10,8 @@
     <p:sldId id="259" r:id="rId4"/>
     <p:sldId id="258" r:id="rId5"/>
     <p:sldId id="260" r:id="rId6"/>
+    <p:sldId id="261" r:id="rId7"/>
+    <p:sldId id="262" r:id="rId8"/>
   </p:sldIdLst>
   <p:sldSz cx="12192000" cy="6858000"/>
   <p:notesSz cx="6858000" cy="9144000"/>
@@ -3347,7 +3349,15 @@
             </a:r>
             <a:r>
               <a:rPr lang="en-US" dirty="0" smtClean="0"/>
-              <a:t> container</a:t>
+              <a:t> container for the </a:t>
+            </a:r>
+            <a:r>
+              <a:rPr lang="en-US" dirty="0" err="1" smtClean="0"/>
+              <a:t>BeagleBone</a:t>
+            </a:r>
+            <a:r>
+              <a:rPr lang="en-US" dirty="0" smtClean="0"/>
+              <a:t>:</a:t>
             </a:r>
             <a:endParaRPr lang="en-US" dirty="0"/>
           </a:p>
@@ -3541,42 +3551,50 @@
           <a:p>
             <a:r>
               <a:rPr lang="en-US" dirty="0" smtClean="0"/>
-              <a:t>My new ROS2 hardware driver</a:t>
-            </a:r>
-            <a:endParaRPr lang="en-US" dirty="0"/>
-          </a:p>
-        </p:txBody>
-      </p:sp>
-      <p:sp>
-        <p:nvSpPr>
-          <p:cNvPr id="3" name="Content Placeholder 2"/>
-          <p:cNvSpPr>
-            <a:spLocks noGrp="1"/>
-          </p:cNvSpPr>
-          <p:nvPr>
-            <p:ph idx="1"/>
-          </p:nvPr>
-        </p:nvSpPr>
-        <p:spPr/>
-        <p:txBody>
-          <a:bodyPr/>
-          <a:lstStyle/>
-          <a:p>
-            <a:r>
-              <a:rPr lang="en-US" dirty="0" smtClean="0"/>
-              <a:t>Robot_Lib.py:</a:t>
-            </a:r>
-          </a:p>
-          <a:p>
-            <a:pPr lvl="1"/>
-            <a:r>
-              <a:rPr lang="en-US" dirty="0" smtClean="0"/>
-              <a:t>Makes SSH connection to </a:t>
+              <a:t>My new ROS2 hardware driver for </a:t>
             </a:r>
             <a:r>
               <a:rPr lang="en-US" dirty="0" err="1" smtClean="0"/>
               <a:t>BeagleBone</a:t>
             </a:r>
+            <a:r>
+              <a:rPr lang="en-US" dirty="0" smtClean="0"/>
+              <a:t>:</a:t>
+            </a:r>
+            <a:endParaRPr lang="en-US" dirty="0"/>
+          </a:p>
+        </p:txBody>
+      </p:sp>
+      <p:sp>
+        <p:nvSpPr>
+          <p:cNvPr id="3" name="Content Placeholder 2"/>
+          <p:cNvSpPr>
+            <a:spLocks noGrp="1"/>
+          </p:cNvSpPr>
+          <p:nvPr>
+            <p:ph idx="1"/>
+          </p:nvPr>
+        </p:nvSpPr>
+        <p:spPr/>
+        <p:txBody>
+          <a:bodyPr/>
+          <a:lstStyle/>
+          <a:p>
+            <a:r>
+              <a:rPr lang="en-US" dirty="0" smtClean="0"/>
+              <a:t>Robot_Lib.py:</a:t>
+            </a:r>
+          </a:p>
+          <a:p>
+            <a:pPr lvl="1"/>
+            <a:r>
+              <a:rPr lang="en-US" dirty="0" smtClean="0"/>
+              <a:t>Makes SSH connection to </a:t>
+            </a:r>
+            <a:r>
+              <a:rPr lang="en-US" dirty="0" err="1" smtClean="0"/>
+              <a:t>BeagleBone</a:t>
+            </a:r>
             <a:endParaRPr lang="en-US" dirty="0" smtClean="0"/>
           </a:p>
           <a:p>
@@ -3636,13 +3654,6 @@
             <a:r>
               <a:rPr lang="en-US" dirty="0" smtClean="0"/>
               <a:t>*Current issues:</a:t>
-            </a:r>
-          </a:p>
-          <a:p>
-            <a:pPr lvl="1"/>
-            <a:r>
-              <a:rPr lang="en-US" dirty="0" smtClean="0"/>
-              <a:t>*Need to have a hard stop, not just going down slowly from earlier motor values.</a:t>
             </a:r>
           </a:p>
           <a:p>
@@ -3662,6 +3673,286 @@
     <p:extLst>
       <p:ext uri="{BB962C8B-B14F-4D97-AF65-F5344CB8AC3E}">
         <p14:creationId xmlns:p14="http://schemas.microsoft.com/office/powerpoint/2010/main" val="1440059508"/>
+      </p:ext>
+    </p:extLst>
+  </p:cSld>
+  <p:clrMapOvr>
+    <a:masterClrMapping/>
+  </p:clrMapOvr>
+</p:sld>
+</file>
+
+<file path=ppt/slides/slide6.xml><?xml version="1.0" encoding="utf-8"?>
+<p:sld xmlns:a="http://schemas.openxmlformats.org/drawingml/2006/main" xmlns:r="http://schemas.openxmlformats.org/officeDocument/2006/relationships" xmlns:p="http://schemas.openxmlformats.org/presentationml/2006/main">
+  <p:cSld>
+    <p:spTree>
+      <p:nvGrpSpPr>
+        <p:cNvPr id="1" name=""/>
+        <p:cNvGrpSpPr/>
+        <p:nvPr/>
+      </p:nvGrpSpPr>
+      <p:grpSpPr>
+        <a:xfrm>
+          <a:off x="0" y="0"/>
+          <a:ext cx="0" cy="0"/>
+          <a:chOff x="0" y="0"/>
+          <a:chExt cx="0" cy="0"/>
+        </a:xfrm>
+      </p:grpSpPr>
+      <p:sp>
+        <p:nvSpPr>
+          <p:cNvPr id="2" name="Title 1"/>
+          <p:cNvSpPr>
+            <a:spLocks noGrp="1"/>
+          </p:cNvSpPr>
+          <p:nvPr>
+            <p:ph type="title"/>
+          </p:nvPr>
+        </p:nvSpPr>
+        <p:spPr/>
+        <p:txBody>
+          <a:bodyPr/>
+          <a:lstStyle/>
+          <a:p>
+            <a:r>
+              <a:rPr lang="en-US" dirty="0" smtClean="0"/>
+              <a:t>New </a:t>
+            </a:r>
+            <a:r>
+              <a:rPr lang="en-US" dirty="0" err="1" smtClean="0"/>
+              <a:t>docker</a:t>
+            </a:r>
+            <a:r>
+              <a:rPr lang="en-US" dirty="0" smtClean="0"/>
+              <a:t> container for </a:t>
+            </a:r>
+            <a:r>
+              <a:rPr lang="en-US" dirty="0" err="1" smtClean="0"/>
+              <a:t>Yahboom</a:t>
+            </a:r>
+            <a:r>
+              <a:rPr lang="en-US" dirty="0" smtClean="0"/>
+              <a:t> </a:t>
+            </a:r>
+            <a:r>
+              <a:rPr lang="en-US" dirty="0" err="1" smtClean="0"/>
+              <a:t>Rosmaster</a:t>
+            </a:r>
+            <a:r>
+              <a:rPr lang="en-US" dirty="0" smtClean="0"/>
+              <a:t> board:</a:t>
+            </a:r>
+            <a:endParaRPr lang="en-US" dirty="0"/>
+          </a:p>
+        </p:txBody>
+      </p:sp>
+      <p:sp>
+        <p:nvSpPr>
+          <p:cNvPr id="3" name="Content Placeholder 2"/>
+          <p:cNvSpPr>
+            <a:spLocks noGrp="1"/>
+          </p:cNvSpPr>
+          <p:nvPr>
+            <p:ph idx="1"/>
+          </p:nvPr>
+        </p:nvSpPr>
+        <p:spPr/>
+        <p:txBody>
+          <a:bodyPr/>
+          <a:lstStyle/>
+          <a:p>
+            <a:r>
+              <a:rPr lang="en-US" dirty="0" smtClean="0"/>
+              <a:t>bash ~/Rosmaster_run_docker.sh</a:t>
+            </a:r>
+          </a:p>
+          <a:p>
+            <a:r>
+              <a:rPr lang="en-US" dirty="0" smtClean="0"/>
+              <a:t># Need to specify the COM port:</a:t>
+            </a:r>
+          </a:p>
+          <a:p>
+            <a:r>
+              <a:rPr lang="en-US" dirty="0" smtClean="0"/>
+              <a:t>ros2 </a:t>
+            </a:r>
+            <a:r>
+              <a:rPr lang="en-US" dirty="0"/>
+              <a:t>launch </a:t>
+            </a:r>
+            <a:r>
+              <a:rPr lang="en-US" dirty="0" err="1"/>
+              <a:t>my_robot_bringup</a:t>
+            </a:r>
+            <a:r>
+              <a:rPr lang="en-US" dirty="0"/>
+              <a:t> bringup.launch.py </a:t>
+            </a:r>
+            <a:r>
+              <a:rPr lang="en-US" dirty="0" err="1" smtClean="0"/>
+              <a:t>com_port</a:t>
+            </a:r>
+            <a:r>
+              <a:rPr lang="en-US" dirty="0"/>
+              <a:t>:=/</a:t>
+            </a:r>
+            <a:r>
+              <a:rPr lang="en-US" dirty="0" err="1"/>
+              <a:t>dev</a:t>
+            </a:r>
+            <a:r>
+              <a:rPr lang="en-US" dirty="0"/>
+              <a:t>/ttyUSB0</a:t>
+            </a:r>
+          </a:p>
+        </p:txBody>
+      </p:sp>
+    </p:spTree>
+    <p:extLst>
+      <p:ext uri="{BB962C8B-B14F-4D97-AF65-F5344CB8AC3E}">
+        <p14:creationId xmlns:p14="http://schemas.microsoft.com/office/powerpoint/2010/main" val="2382228982"/>
+      </p:ext>
+    </p:extLst>
+  </p:cSld>
+  <p:clrMapOvr>
+    <a:masterClrMapping/>
+  </p:clrMapOvr>
+</p:sld>
+</file>
+
+<file path=ppt/slides/slide7.xml><?xml version="1.0" encoding="utf-8"?>
+<p:sld xmlns:a="http://schemas.openxmlformats.org/drawingml/2006/main" xmlns:r="http://schemas.openxmlformats.org/officeDocument/2006/relationships" xmlns:p="http://schemas.openxmlformats.org/presentationml/2006/main">
+  <p:cSld>
+    <p:spTree>
+      <p:nvGrpSpPr>
+        <p:cNvPr id="1" name=""/>
+        <p:cNvGrpSpPr/>
+        <p:nvPr/>
+      </p:nvGrpSpPr>
+      <p:grpSpPr>
+        <a:xfrm>
+          <a:off x="0" y="0"/>
+          <a:ext cx="0" cy="0"/>
+          <a:chOff x="0" y="0"/>
+          <a:chExt cx="0" cy="0"/>
+        </a:xfrm>
+      </p:grpSpPr>
+      <p:sp>
+        <p:nvSpPr>
+          <p:cNvPr id="2" name="Title 1"/>
+          <p:cNvSpPr>
+            <a:spLocks noGrp="1"/>
+          </p:cNvSpPr>
+          <p:nvPr>
+            <p:ph type="title"/>
+          </p:nvPr>
+        </p:nvSpPr>
+        <p:spPr/>
+        <p:txBody>
+          <a:bodyPr/>
+          <a:lstStyle/>
+          <a:p>
+            <a:r>
+              <a:rPr lang="en-US" dirty="0" smtClean="0"/>
+              <a:t>My new ROS2 hardware driver for </a:t>
+            </a:r>
+            <a:r>
+              <a:rPr lang="en-US" dirty="0" err="1" smtClean="0"/>
+              <a:t>Rosmaster</a:t>
+            </a:r>
+            <a:r>
+              <a:rPr lang="en-US" dirty="0" smtClean="0"/>
+              <a:t> </a:t>
+            </a:r>
+            <a:r>
+              <a:rPr lang="en-US" dirty="0" err="1" smtClean="0"/>
+              <a:t>Yahboom</a:t>
+            </a:r>
+            <a:r>
+              <a:rPr lang="en-US" dirty="0" smtClean="0"/>
+              <a:t> Board V3</a:t>
+            </a:r>
+            <a:endParaRPr lang="en-US" dirty="0"/>
+          </a:p>
+        </p:txBody>
+      </p:sp>
+      <p:sp>
+        <p:nvSpPr>
+          <p:cNvPr id="3" name="Content Placeholder 2"/>
+          <p:cNvSpPr>
+            <a:spLocks noGrp="1"/>
+          </p:cNvSpPr>
+          <p:nvPr>
+            <p:ph idx="1"/>
+          </p:nvPr>
+        </p:nvSpPr>
+        <p:spPr/>
+        <p:txBody>
+          <a:bodyPr/>
+          <a:lstStyle/>
+          <a:p>
+            <a:r>
+              <a:rPr lang="en-US" dirty="0" smtClean="0"/>
+              <a:t>It creates a bot with:</a:t>
+            </a:r>
+          </a:p>
+          <a:p>
+            <a:pPr lvl="1"/>
+            <a:r>
+              <a:rPr lang="en-US" dirty="0" smtClean="0"/>
+              <a:t>from </a:t>
+            </a:r>
+            <a:r>
+              <a:rPr lang="en-US" dirty="0" err="1" smtClean="0"/>
+              <a:t>Rosmaster_Lib</a:t>
+            </a:r>
+            <a:r>
+              <a:rPr lang="en-US" dirty="0" smtClean="0"/>
+              <a:t> import </a:t>
+            </a:r>
+            <a:r>
+              <a:rPr lang="en-US" dirty="0" err="1" smtClean="0"/>
+              <a:t>Rosmaster</a:t>
+            </a:r>
+            <a:endParaRPr lang="en-US" dirty="0" smtClean="0"/>
+          </a:p>
+          <a:p>
+            <a:pPr lvl="1"/>
+            <a:r>
+              <a:rPr lang="en-US" dirty="0" smtClean="0"/>
+              <a:t>bot = </a:t>
+            </a:r>
+            <a:r>
+              <a:rPr lang="en-US" dirty="0" err="1" smtClean="0"/>
+              <a:t>Rosmaster</a:t>
+            </a:r>
+            <a:r>
+              <a:rPr lang="en-US" dirty="0" smtClean="0"/>
+              <a:t>(com="/</a:t>
+            </a:r>
+            <a:r>
+              <a:rPr lang="en-US" dirty="0" err="1" smtClean="0"/>
+              <a:t>dev</a:t>
+            </a:r>
+            <a:r>
+              <a:rPr lang="en-US" dirty="0" smtClean="0"/>
+              <a:t>/ttyUSB0")</a:t>
+            </a:r>
+          </a:p>
+          <a:p>
+            <a:r>
+              <a:rPr lang="en-US" dirty="0" smtClean="0"/>
+              <a:t>*Need to modify it to adjust for motor polarity.</a:t>
+            </a:r>
+            <a:endParaRPr lang="en-US" dirty="0"/>
+          </a:p>
+        </p:txBody>
+      </p:sp>
+    </p:spTree>
+    <p:extLst>
+      <p:ext uri="{BB962C8B-B14F-4D97-AF65-F5344CB8AC3E}">
+        <p14:creationId xmlns:p14="http://schemas.microsoft.com/office/powerpoint/2010/main" val="2816097557"/>
       </p:ext>
     </p:extLst>
   </p:cSld>

--- a/embedded/RobotOperatingSystem/My_ROS2_robot.pptx
+++ b/embedded/RobotOperatingSystem/My_ROS2_robot.pptx
@@ -110,6 +110,11 @@
       </a:defRPr>
     </a:lvl9pPr>
   </p:defaultTextStyle>
+  <p:extLst>
+    <p:ext uri="{EFAFB233-063F-42B5-8137-9DF3F51BA10A}">
+      <p15:sldGuideLst xmlns:p15="http://schemas.microsoft.com/office/powerpoint/2012/main"/>
+    </p:ext>
+  </p:extLst>
 </p:presentation>
 </file>
 
@@ -244,7 +249,7 @@
           <a:p>
             <a:fld id="{54D9F455-F842-49DC-9F73-AF0BDCAB1BDE}" type="datetimeFigureOut">
               <a:rPr lang="en-US" smtClean="0"/>
-              <a:t>6/2/2026</a:t>
+              <a:t>6/5/2026</a:t>
             </a:fld>
             <a:endParaRPr lang="en-US"/>
           </a:p>
@@ -414,7 +419,7 @@
           <a:p>
             <a:fld id="{54D9F455-F842-49DC-9F73-AF0BDCAB1BDE}" type="datetimeFigureOut">
               <a:rPr lang="en-US" smtClean="0"/>
-              <a:t>6/2/2026</a:t>
+              <a:t>6/5/2026</a:t>
             </a:fld>
             <a:endParaRPr lang="en-US"/>
           </a:p>
@@ -594,7 +599,7 @@
           <a:p>
             <a:fld id="{54D9F455-F842-49DC-9F73-AF0BDCAB1BDE}" type="datetimeFigureOut">
               <a:rPr lang="en-US" smtClean="0"/>
-              <a:t>6/2/2026</a:t>
+              <a:t>6/5/2026</a:t>
             </a:fld>
             <a:endParaRPr lang="en-US"/>
           </a:p>
@@ -764,7 +769,7 @@
           <a:p>
             <a:fld id="{54D9F455-F842-49DC-9F73-AF0BDCAB1BDE}" type="datetimeFigureOut">
               <a:rPr lang="en-US" smtClean="0"/>
-              <a:t>6/2/2026</a:t>
+              <a:t>6/5/2026</a:t>
             </a:fld>
             <a:endParaRPr lang="en-US"/>
           </a:p>
@@ -1010,7 +1015,7 @@
           <a:p>
             <a:fld id="{54D9F455-F842-49DC-9F73-AF0BDCAB1BDE}" type="datetimeFigureOut">
               <a:rPr lang="en-US" smtClean="0"/>
-              <a:t>6/2/2026</a:t>
+              <a:t>6/5/2026</a:t>
             </a:fld>
             <a:endParaRPr lang="en-US"/>
           </a:p>
@@ -1242,7 +1247,7 @@
           <a:p>
             <a:fld id="{54D9F455-F842-49DC-9F73-AF0BDCAB1BDE}" type="datetimeFigureOut">
               <a:rPr lang="en-US" smtClean="0"/>
-              <a:t>6/2/2026</a:t>
+              <a:t>6/5/2026</a:t>
             </a:fld>
             <a:endParaRPr lang="en-US"/>
           </a:p>
@@ -1609,7 +1614,7 @@
           <a:p>
             <a:fld id="{54D9F455-F842-49DC-9F73-AF0BDCAB1BDE}" type="datetimeFigureOut">
               <a:rPr lang="en-US" smtClean="0"/>
-              <a:t>6/2/2026</a:t>
+              <a:t>6/5/2026</a:t>
             </a:fld>
             <a:endParaRPr lang="en-US"/>
           </a:p>
@@ -1727,7 +1732,7 @@
           <a:p>
             <a:fld id="{54D9F455-F842-49DC-9F73-AF0BDCAB1BDE}" type="datetimeFigureOut">
               <a:rPr lang="en-US" smtClean="0"/>
-              <a:t>6/2/2026</a:t>
+              <a:t>6/5/2026</a:t>
             </a:fld>
             <a:endParaRPr lang="en-US"/>
           </a:p>
@@ -1822,7 +1827,7 @@
           <a:p>
             <a:fld id="{54D9F455-F842-49DC-9F73-AF0BDCAB1BDE}" type="datetimeFigureOut">
               <a:rPr lang="en-US" smtClean="0"/>
-              <a:t>6/2/2026</a:t>
+              <a:t>6/5/2026</a:t>
             </a:fld>
             <a:endParaRPr lang="en-US"/>
           </a:p>
@@ -2099,7 +2104,7 @@
           <a:p>
             <a:fld id="{54D9F455-F842-49DC-9F73-AF0BDCAB1BDE}" type="datetimeFigureOut">
               <a:rPr lang="en-US" smtClean="0"/>
-              <a:t>6/2/2026</a:t>
+              <a:t>6/5/2026</a:t>
             </a:fld>
             <a:endParaRPr lang="en-US"/>
           </a:p>
@@ -2352,7 +2357,7 @@
           <a:p>
             <a:fld id="{54D9F455-F842-49DC-9F73-AF0BDCAB1BDE}" type="datetimeFigureOut">
               <a:rPr lang="en-US" smtClean="0"/>
-              <a:t>6/2/2026</a:t>
+              <a:t>6/5/2026</a:t>
             </a:fld>
             <a:endParaRPr lang="en-US"/>
           </a:p>
@@ -2565,7 +2570,7 @@
           <a:p>
             <a:fld id="{54D9F455-F842-49DC-9F73-AF0BDCAB1BDE}" type="datetimeFigureOut">
               <a:rPr lang="en-US" smtClean="0"/>
-              <a:t>6/2/2026</a:t>
+              <a:t>6/5/2026</a:t>
             </a:fld>
             <a:endParaRPr lang="en-US"/>
           </a:p>
@@ -3577,7 +3582,9 @@
         </p:nvSpPr>
         <p:spPr/>
         <p:txBody>
-          <a:bodyPr/>
+          <a:bodyPr>
+            <a:normAutofit fontScale="92500" lnSpcReduction="20000"/>
+          </a:bodyPr>
           <a:lstStyle/>
           <a:p>
             <a:r>
@@ -3647,6 +3654,75 @@
             <a:r>
               <a:rPr lang="en-US" dirty="0" err="1" smtClean="0"/>
               <a:t>WiFi</a:t>
+            </a:r>
+            <a:endParaRPr lang="en-US" dirty="0" smtClean="0"/>
+          </a:p>
+          <a:p>
+            <a:r>
+              <a:rPr lang="en-US" dirty="0" smtClean="0"/>
+              <a:t>The </a:t>
+            </a:r>
+            <a:r>
+              <a:rPr lang="en-US" dirty="0" err="1" smtClean="0"/>
+              <a:t>BeagleBone</a:t>
+            </a:r>
+            <a:r>
+              <a:rPr lang="en-US" dirty="0" smtClean="0"/>
+              <a:t> has its /</a:t>
+            </a:r>
+            <a:r>
+              <a:rPr lang="en-US" dirty="0" err="1" smtClean="0"/>
+              <a:t>etc</a:t>
+            </a:r>
+            <a:r>
+              <a:rPr lang="en-US" dirty="0" smtClean="0"/>
+              <a:t>/</a:t>
+            </a:r>
+            <a:r>
+              <a:rPr lang="en-US" dirty="0" err="1" smtClean="0"/>
+              <a:t>rc.local</a:t>
+            </a:r>
+            <a:r>
+              <a:rPr lang="en-US" dirty="0" smtClean="0"/>
+              <a:t> file edited to run </a:t>
+            </a:r>
+            <a:r>
+              <a:rPr lang="en-US" dirty="0" err="1" smtClean="0"/>
+              <a:t>joes_robot_control</a:t>
+            </a:r>
+            <a:r>
+              <a:rPr lang="en-US" dirty="0" smtClean="0"/>
+              <a:t> on startup - *However, sometimes it is not running after a reboot, maybe a timing problem.</a:t>
+            </a:r>
+          </a:p>
+          <a:p>
+            <a:pPr lvl="1"/>
+            <a:r>
+              <a:rPr lang="en-US" dirty="0" smtClean="0"/>
+              <a:t>To debug what </a:t>
+            </a:r>
+            <a:r>
+              <a:rPr lang="en-US" dirty="0" err="1" smtClean="0"/>
+              <a:t>joes_robot_control</a:t>
+            </a:r>
+            <a:r>
+              <a:rPr lang="en-US" dirty="0" smtClean="0"/>
+              <a:t> is outputting run this:</a:t>
+            </a:r>
+          </a:p>
+          <a:p>
+            <a:pPr lvl="1"/>
+            <a:r>
+              <a:rPr lang="en-US" b="1" dirty="0" err="1"/>
+              <a:t>systemctl</a:t>
+            </a:r>
+            <a:r>
+              <a:rPr lang="en-US" b="1" dirty="0"/>
+              <a:t> status </a:t>
+            </a:r>
+            <a:r>
+              <a:rPr lang="en-US" b="1" dirty="0" err="1"/>
+              <a:t>rc-local.service</a:t>
             </a:r>
             <a:endParaRPr lang="en-US" dirty="0" smtClean="0"/>
           </a:p>
